--- a/docs/fase_2/apresentacao_video.pptx
+++ b/docs/fase_2/apresentacao_video.pptx
@@ -1407,18 +1407,14 @@
           <a:p>
             <a:r>
               <a:rPr dirty="0"/>
-              <a:t>4:20–5:00 — </a:t>
-            </a:r>
-            <a:r>
-              <a:rPr dirty="0" err="1"/>
-              <a:t>Pedido</a:t>
-            </a:r>
-            <a:br>
+              <a:t>4:20–5:00 </a:t>
+            </a:r>
+            <a:endParaRPr lang="pt-BR" dirty="0"/>
+          </a:p>
+          <a:p>
+            <a:r>
               <a:rPr lang="pt-BR" dirty="0"/>
-            </a:br>
-            <a:r>
-              <a:rPr lang="pt-BR" dirty="0"/>
-              <a:t>Fica agora o pedido de validação da proposta com os </a:t>
+              <a:t>Pra nova proposta dessa fase, fica o pedido de validação da proposta nova com os </a:t>
             </a:r>
             <a:r>
               <a:rPr dirty="0" err="1"/>
@@ -1433,12 +1429,19 @@
               <a:t>agentes</a:t>
             </a:r>
             <a:r>
+              <a:rPr lang="pt-BR" dirty="0"/>
+              <a:t> distribuídos em dois programa</a:t>
+            </a:r>
+            <a:r>
               <a:rPr dirty="0"/>
               <a:t>. </a:t>
             </a:r>
+            <a:endParaRPr lang="pt-BR" dirty="0"/>
+          </a:p>
+          <a:p>
             <a:r>
               <a:rPr lang="pt-BR" dirty="0"/>
-              <a:t>Na </a:t>
+              <a:t>Para a p</a:t>
             </a:r>
             <a:r>
               <a:rPr dirty="0" err="1"/>
@@ -1454,18 +1457,7 @@
             </a:r>
             <a:r>
               <a:rPr lang="pt-BR" dirty="0"/>
-              <a:t> é possível passar para a prototipação</a:t>
-            </a:r>
-            <a:r>
-              <a:rPr dirty="0"/>
-              <a:t>. </a:t>
-            </a:r>
-            <a:br>
-              <a:rPr lang="pt-BR" dirty="0"/>
-            </a:br>
-            <a:r>
-              <a:rPr lang="pt-BR" dirty="0"/>
-              <a:t>Muito obrigada pelo tempo, fico no aguardo do retorno.</a:t>
+              <a:t>, será possível passar para a prototipação do projeto, começando por entrega, voz do cliente e recompra seletiva. Obrigada.</a:t>
             </a:r>
             <a:endParaRPr dirty="0"/>
           </a:p>
